--- a/examples/repositories/office-powerpoint-mcp/deck.pptx
+++ b/examples/repositories/office-powerpoint-mcp/deck.pptx
@@ -135,6 +135,16 @@
               </c:strCache>
             </c:strRef>
           </c:tx>
+          <c:spPr>
+            <a:pattFill prst="dkDnDiag">
+              <a:fgClr>
+                <a:srgbClr val="215D85"/>
+              </a:fgClr>
+              <a:bgClr>
+                <a:srgbClr val="FFFFFF"/>
+              </a:bgClr>
+            </a:pattFill>
+          </c:spPr>
           <c:cat>
             <c:strRef>
               <c:f>Sheet1!$A$2:$A$5</c:f>
@@ -191,6 +201,11 @@
               </c:strCache>
             </c:strRef>
           </c:tx>
+          <c:spPr>
+            <a:solidFill>
+              <a:srgbClr val="128278"/>
+            </a:solidFill>
+          </c:spPr>
           <c:cat>
             <c:strRef>
               <c:f>Sheet1!$A$2:$A$5</c:f>
@@ -233,6 +248,27 @@
             </c:numRef>
           </c:val>
         </c:ser>
+        <c:dLbls>
+          <c:txPr>
+            <a:bodyPr/>
+            <a:lstStyle/>
+            <a:p>
+              <a:pPr>
+                <a:defRPr sz="1300" lang="ja-JP">
+                  <a:latin typeface="BIZ UDPGothic"/>
+                  <a:ea typeface="BIZ UDPGothic"/>
+                </a:defRPr>
+              </a:pPr>
+            </a:p>
+          </c:txPr>
+          <c:showLegendKey val="0"/>
+          <c:showVal val="1"/>
+          <c:showCatName val="0"/>
+          <c:showSerName val="0"/>
+          <c:showPercent val="0"/>
+          <c:showBubbleSize val="0"/>
+          <c:showLeaderLines val="1"/>
+        </c:dLbls>
         <c:axId val="-2068027336"/>
         <c:axId val="-2113994440"/>
       </c:barChart>
@@ -246,6 +282,18 @@
         <c:majorTickMark val="out"/>
         <c:minorTickMark val="none"/>
         <c:tickLblPos val="nextTo"/>
+        <c:txPr>
+          <a:bodyPr/>
+          <a:lstStyle/>
+          <a:p>
+            <a:pPr>
+              <a:defRPr sz="1600" lang="ja-JP">
+                <a:latin typeface="BIZ UDPGothic"/>
+                <a:ea typeface="BIZ UDPGothic"/>
+              </a:defRPr>
+            </a:pPr>
+          </a:p>
+        </c:txPr>
         <c:crossAx val="-2113994440"/>
         <c:crosses val="autoZero"/>
         <c:auto val="1"/>
@@ -277,6 +325,195 @@
         <c:majorTickMark val="out"/>
         <c:minorTickMark val="none"/>
         <c:tickLblPos val="nextTo"/>
+        <c:txPr>
+          <a:bodyPr/>
+          <a:lstStyle/>
+          <a:p>
+            <a:pPr>
+              <a:defRPr sz="1400" lang="ja-JP">
+                <a:latin typeface="BIZ UDPGothic"/>
+                <a:ea typeface="BIZ UDPGothic"/>
+              </a:defRPr>
+            </a:pPr>
+          </a:p>
+        </c:txPr>
+        <c:crossAx val="-2068027336"/>
+        <c:crosses val="autoZero"/>
+      </c:valAx>
+    </c:plotArea>
+    <c:legend>
+      <c:legendPos val="b"/>
+      <c:overlay val="0"/>
+      <c:txPr>
+        <a:bodyPr/>
+        <a:lstStyle/>
+        <a:p>
+          <a:pPr>
+            <a:defRPr sz="1600" lang="ja-JP">
+              <a:latin typeface="BIZ UDPGothic"/>
+              <a:ea typeface="BIZ UDPGothic"/>
+            </a:defRPr>
+          </a:pPr>
+        </a:p>
+      </c:txPr>
+    </c:legend>
+    <c:dispBlanksAs val="gap"/>
+  </c:chart>
+  <c:txPr>
+    <a:bodyPr/>
+    <a:lstStyle/>
+    <a:p>
+      <a:pPr>
+        <a:defRPr sz="1800" lang="ja-JP">
+          <a:latin typeface="BIZ UDPGothic"/>
+          <a:ea typeface="BIZ UDPGothic"/>
+        </a:defRPr>
+      </a:pPr>
+      <a:endParaRPr lang="ja-JP">
+        <a:latin typeface="BIZ UDPGothic"/>
+        <a:ea typeface="BIZ UDPGothic"/>
+      </a:endParaRPr>
+    </a:p>
+  </c:txPr>
+  <c:externalData r:id="rId1">
+    <c:autoUpdate val="0"/>
+  </c:externalData>
+</c:chartSpace>
+</file>
+
+<file path=ppt/charts/chart2.xml><?xml version="1.0" encoding="utf-8"?>
+<c:chartSpace xmlns:c="http://schemas.openxmlformats.org/drawingml/2006/chart" xmlns:a="http://schemas.openxmlformats.org/drawingml/2006/main" xmlns:r="http://schemas.openxmlformats.org/officeDocument/2006/relationships">
+  <c:date1904 val="0"/>
+  <c:chart>
+    <c:autoTitleDeleted val="1"/>
+    <c:plotArea>
+      <c:barChart>
+        <c:barDir val="bar"/>
+        <c:grouping val="clustered"/>
+        <c:ser>
+          <c:idx val="0"/>
+          <c:order val="0"/>
+          <c:tx>
+            <c:strRef>
+              <c:f>Sheet1!$B$1</c:f>
+              <c:strCache>
+                <c:ptCount val="1"/>
+                <c:pt idx="0">
+                  <c:v>当月−前年（万円）</c:v>
+                </c:pt>
+              </c:strCache>
+            </c:strRef>
+          </c:tx>
+          <c:spPr>
+            <a:solidFill>
+              <a:srgbClr val="128278"/>
+            </a:solidFill>
+          </c:spPr>
+          <c:cat>
+            <c:strRef>
+              <c:f>Sheet1!$A$2:$A$3</c:f>
+              <c:strCache>
+                <c:ptCount val="2"/>
+                <c:pt idx="0">
+                  <c:v>売上差</c:v>
+                </c:pt>
+                <c:pt idx="1">
+                  <c:v>粗利額差</c:v>
+                </c:pt>
+              </c:strCache>
+            </c:strRef>
+          </c:cat>
+          <c:val>
+            <c:numRef>
+              <c:f>Sheet1!$B$2:$B$3</c:f>
+              <c:numCache>
+                <c:formatCode>General</c:formatCode>
+                <c:ptCount val="2"/>
+                <c:pt idx="0">
+                  <c:v>200.0</c:v>
+                </c:pt>
+                <c:pt idx="1">
+                  <c:v>52.0</c:v>
+                </c:pt>
+              </c:numCache>
+            </c:numRef>
+          </c:val>
+        </c:ser>
+        <c:dLbls>
+          <c:txPr>
+            <a:bodyPr/>
+            <a:lstStyle/>
+            <a:p>
+              <a:pPr>
+                <a:defRPr sz="1200" lang="ja-JP">
+                  <a:latin typeface="BIZ UDPGothic"/>
+                  <a:ea typeface="BIZ UDPGothic"/>
+                </a:defRPr>
+              </a:pPr>
+            </a:p>
+          </c:txPr>
+          <c:showLegendKey val="0"/>
+          <c:showVal val="1"/>
+          <c:showCatName val="0"/>
+          <c:showSerName val="0"/>
+          <c:showPercent val="0"/>
+          <c:showBubbleSize val="0"/>
+          <c:showLeaderLines val="1"/>
+        </c:dLbls>
+        <c:gapWidth val="60"/>
+        <c:axId val="-2068027336"/>
+        <c:axId val="-2113994440"/>
+      </c:barChart>
+      <c:catAx>
+        <c:axId val="-2068027336"/>
+        <c:scaling>
+          <c:orientation val="minMax"/>
+        </c:scaling>
+        <c:delete val="0"/>
+        <c:axPos val="l"/>
+        <c:majorTickMark val="out"/>
+        <c:minorTickMark val="none"/>
+        <c:tickLblPos val="nextTo"/>
+        <c:txPr>
+          <a:bodyPr/>
+          <a:lstStyle/>
+          <a:p>
+            <a:pPr>
+              <a:defRPr sz="1200" lang="ja-JP">
+                <a:latin typeface="BIZ UDPGothic"/>
+                <a:ea typeface="BIZ UDPGothic"/>
+              </a:defRPr>
+            </a:pPr>
+          </a:p>
+        </c:txPr>
+        <c:crossAx val="-2113994440"/>
+        <c:crosses val="autoZero"/>
+        <c:auto val="1"/>
+        <c:lblAlgn val="ctr"/>
+        <c:lblOffset val="100"/>
+        <c:noMultiLvlLbl val="0"/>
+      </c:catAx>
+      <c:valAx>
+        <c:axId val="-2113994440"/>
+        <c:scaling/>
+        <c:delete val="0"/>
+        <c:axPos val="b"/>
+        <c:majorGridlines/>
+        <c:majorTickMark val="out"/>
+        <c:minorTickMark val="none"/>
+        <c:tickLblPos val="nextTo"/>
+        <c:txPr>
+          <a:bodyPr/>
+          <a:lstStyle/>
+          <a:p>
+            <a:pPr>
+              <a:defRPr sz="1100" lang="ja-JP">
+                <a:latin typeface="BIZ UDPGothic"/>
+                <a:ea typeface="BIZ UDPGothic"/>
+              </a:defRPr>
+            </a:pPr>
+          </a:p>
+        </c:txPr>
         <c:crossAx val="-2068027336"/>
         <c:crosses val="autoZero"/>
       </c:valAx>
@@ -288,9 +525,15 @@
     <a:lstStyle/>
     <a:p>
       <a:pPr>
-        <a:defRPr sz="1800"/>
+        <a:defRPr sz="1800" lang="ja-JP">
+          <a:latin typeface="BIZ UDPGothic"/>
+          <a:ea typeface="BIZ UDPGothic"/>
+        </a:defRPr>
       </a:pPr>
-      <a:endParaRPr lang="en-US"/>
+      <a:endParaRPr lang="ja-JP">
+        <a:latin typeface="BIZ UDPGothic"/>
+        <a:ea typeface="BIZ UDPGothic"/>
+      </a:endParaRPr>
     </a:p>
   </c:txPr>
   <c:externalData r:id="rId1">
@@ -4077,8 +4320,8 @@
                 <a:solidFill>
                   <a:srgbClr val="202C39"/>
                 </a:solidFill>
-                <a:latin typeface="Noto Sans JP"/>
-                <a:ea typeface="Noto Sans JP"/>
+                <a:latin typeface="BIZ UDPGothic"/>
+                <a:ea typeface="BIZ UDPGothic"/>
               </a:rPr>
               <a:t>くらし便 EC事業 9月報告</a:t>
             </a:r>
@@ -4139,7 +4382,7 @@
         <p:spPr>
           <a:xfrm>
             <a:off x="640080" y="6382512"/>
-            <a:ext cx="9144000" cy="228600"/>
+            <a:ext cx="9144000" cy="320040"/>
           </a:xfrm>
           <a:prstGeom prst="rect">
             <a:avLst/>
@@ -4153,12 +4396,12 @@
           <a:lstStyle/>
           <a:p>
             <a:r>
-              <a:rPr sz="1000" b="0" lang="ja-JP">
+              <a:rPr sz="1300" b="0" lang="ja-JP">
                 <a:solidFill>
                   <a:srgbClr val="202C39"/>
                 </a:solidFill>
-                <a:latin typeface="Noto Sans JP"/>
-                <a:ea typeface="Noto Sans JP"/>
+                <a:latin typeface="BIZ UDPGothic"/>
+                <a:ea typeface="BIZ UDPGothic"/>
               </a:rPr>
               <a:t>架空の組織・数値による制作サンプル</a:t>
             </a:r>
@@ -4174,7 +4417,7 @@
         <p:spPr>
           <a:xfrm>
             <a:off x="10698480" y="6382512"/>
-            <a:ext cx="731520" cy="228600"/>
+            <a:ext cx="731520" cy="320040"/>
           </a:xfrm>
           <a:prstGeom prst="rect">
             <a:avLst/>
@@ -4188,12 +4431,12 @@
           <a:lstStyle/>
           <a:p>
             <a:r>
-              <a:rPr sz="1000" b="0" lang="ja-JP">
+              <a:rPr sz="1300" b="0" lang="ja-JP">
                 <a:solidFill>
                   <a:srgbClr val="202C39"/>
                 </a:solidFill>
-                <a:latin typeface="Noto Sans JP"/>
-                <a:ea typeface="Noto Sans JP"/>
+                <a:latin typeface="BIZ UDPGothic"/>
+                <a:ea typeface="BIZ UDPGothic"/>
               </a:rPr>
               <a:t>1 / 6</a:t>
             </a:r>
@@ -4227,8 +4470,8 @@
                 <a:solidFill>
                   <a:srgbClr val="1C6796"/>
                 </a:solidFill>
-                <a:latin typeface="Noto Sans JP"/>
-                <a:ea typeface="Noto Sans JP"/>
+                <a:latin typeface="BIZ UDPGothic"/>
+                <a:ea typeface="BIZ UDPGothic"/>
               </a:rPr>
               <a:t>売上は伸長。</a:t>
             </a:r>
@@ -4239,8 +4482,8 @@
                 <a:solidFill>
                   <a:srgbClr val="1C6796"/>
                 </a:solidFill>
-                <a:latin typeface="Noto Sans JP"/>
-                <a:ea typeface="Noto Sans JP"/>
+                <a:latin typeface="BIZ UDPGothic"/>
+                <a:ea typeface="BIZ UDPGothic"/>
               </a:rPr>
               <a:t>次月は商品説明と粗利分析を先行。</a:t>
             </a:r>
@@ -4274,8 +4517,8 @@
                 <a:solidFill>
                   <a:srgbClr val="202C39"/>
                 </a:solidFill>
-                <a:latin typeface="Noto Sans JP"/>
-                <a:ea typeface="Noto Sans JP"/>
+                <a:latin typeface="BIZ UDPGothic"/>
+                <a:ea typeface="BIZ UDPGothic"/>
               </a:rPr>
               <a:t>2026年9月／比較：2025年9月</a:t>
             </a:r>
@@ -4286,8 +4529,8 @@
                 <a:solidFill>
                   <a:srgbClr val="202C39"/>
                 </a:solidFill>
-                <a:latin typeface="Noto Sans JP"/>
-                <a:ea typeface="Noto Sans JP"/>
+                <a:latin typeface="BIZ UDPGothic"/>
+                <a:ea typeface="BIZ UDPGothic"/>
               </a:rPr>
               <a:t>事業責任者・販売・商品・CSの月次会議</a:t>
             </a:r>
@@ -4339,8 +4582,8 @@
                 <a:solidFill>
                   <a:srgbClr val="202C39"/>
                 </a:solidFill>
-                <a:latin typeface="Noto Sans JP"/>
-                <a:ea typeface="Noto Sans JP"/>
+                <a:latin typeface="BIZ UDPGothic"/>
+                <a:ea typeface="BIZ UDPGothic"/>
               </a:rPr>
               <a:t>売上増と粗利率低下を同時に見る</a:t>
             </a:r>
@@ -4401,7 +4644,7 @@
         <p:spPr>
           <a:xfrm>
             <a:off x="640080" y="6382512"/>
-            <a:ext cx="9144000" cy="228600"/>
+            <a:ext cx="9144000" cy="320040"/>
           </a:xfrm>
           <a:prstGeom prst="rect">
             <a:avLst/>
@@ -4415,12 +4658,12 @@
           <a:lstStyle/>
           <a:p>
             <a:r>
-              <a:rPr sz="1000" b="0" lang="ja-JP">
+              <a:rPr sz="1300" b="0" lang="ja-JP">
                 <a:solidFill>
                   <a:srgbClr val="202C39"/>
                 </a:solidFill>
-                <a:latin typeface="Noto Sans JP"/>
-                <a:ea typeface="Noto Sans JP"/>
+                <a:latin typeface="BIZ UDPGothic"/>
+                <a:ea typeface="BIZ UDPGothic"/>
               </a:rPr>
               <a:t>架空の組織・数値による制作サンプル</a:t>
             </a:r>
@@ -4436,7 +4679,7 @@
         <p:spPr>
           <a:xfrm>
             <a:off x="10698480" y="6382512"/>
-            <a:ext cx="731520" cy="228600"/>
+            <a:ext cx="731520" cy="320040"/>
           </a:xfrm>
           <a:prstGeom prst="rect">
             <a:avLst/>
@@ -4450,12 +4693,12 @@
           <a:lstStyle/>
           <a:p>
             <a:r>
-              <a:rPr sz="1000" b="0" lang="ja-JP">
+              <a:rPr sz="1300" b="0" lang="ja-JP">
                 <a:solidFill>
                   <a:srgbClr val="202C39"/>
                 </a:solidFill>
-                <a:latin typeface="Noto Sans JP"/>
-                <a:ea typeface="Noto Sans JP"/>
+                <a:latin typeface="BIZ UDPGothic"/>
+                <a:ea typeface="BIZ UDPGothic"/>
               </a:rPr>
               <a:t>2 / 6</a:t>
             </a:r>
@@ -4494,14 +4737,14 @@
                     <a:p>
                       <a:r>
                         <a:rPr sz="2100" b="1" lang="ja-JP">
-                          <a:latin typeface="Noto Sans JP"/>
-                          <a:ea typeface="Noto Sans JP"/>
+                          <a:latin typeface="BIZ UDPGothic"/>
+                          <a:ea typeface="BIZ UDPGothic"/>
                         </a:rPr>
                         <a:t>指標</a:t>
                       </a:r>
                     </a:p>
                   </a:txBody>
-                  <a:tcPr>
+                  <a:tcPr anchor="ctr">
                     <a:solidFill>
                       <a:srgbClr val="1C6796"/>
                     </a:solidFill>
@@ -4514,14 +4757,14 @@
                     <a:p>
                       <a:r>
                         <a:rPr sz="2100" b="1" lang="ja-JP">
-                          <a:latin typeface="Noto Sans JP"/>
-                          <a:ea typeface="Noto Sans JP"/>
+                          <a:latin typeface="BIZ UDPGothic"/>
+                          <a:ea typeface="BIZ UDPGothic"/>
                         </a:rPr>
                         <a:t>当月</a:t>
                       </a:r>
                     </a:p>
                   </a:txBody>
-                  <a:tcPr>
+                  <a:tcPr anchor="ctr">
                     <a:solidFill>
                       <a:srgbClr val="1C6796"/>
                     </a:solidFill>
@@ -4534,14 +4777,14 @@
                     <a:p>
                       <a:r>
                         <a:rPr sz="2100" b="1" lang="ja-JP">
-                          <a:latin typeface="Noto Sans JP"/>
-                          <a:ea typeface="Noto Sans JP"/>
+                          <a:latin typeface="BIZ UDPGothic"/>
+                          <a:ea typeface="BIZ UDPGothic"/>
                         </a:rPr>
                         <a:t>前年同月</a:t>
                       </a:r>
                     </a:p>
                   </a:txBody>
-                  <a:tcPr>
+                  <a:tcPr anchor="ctr">
                     <a:solidFill>
                       <a:srgbClr val="1C6796"/>
                     </a:solidFill>
@@ -4554,14 +4797,14 @@
                     <a:p>
                       <a:r>
                         <a:rPr sz="2100" b="1" lang="ja-JP">
-                          <a:latin typeface="Noto Sans JP"/>
-                          <a:ea typeface="Noto Sans JP"/>
+                          <a:latin typeface="BIZ UDPGothic"/>
+                          <a:ea typeface="BIZ UDPGothic"/>
                         </a:rPr>
                         <a:t>変化</a:t>
                       </a:r>
                     </a:p>
                   </a:txBody>
-                  <a:tcPr>
+                  <a:tcPr anchor="ctr">
                     <a:solidFill>
                       <a:srgbClr val="1C6796"/>
                     </a:solidFill>
@@ -4576,14 +4819,14 @@
                     <a:p>
                       <a:r>
                         <a:rPr sz="2000" lang="ja-JP">
-                          <a:latin typeface="Noto Sans JP"/>
-                          <a:ea typeface="Noto Sans JP"/>
+                          <a:latin typeface="BIZ UDPGothic"/>
+                          <a:ea typeface="BIZ UDPGothic"/>
                         </a:rPr>
                         <a:t>売上</a:t>
                       </a:r>
                     </a:p>
                   </a:txBody>
-                  <a:tcPr/>
+                  <a:tcPr anchor="ctr"/>
                 </a:tc>
                 <a:tc>
                   <a:txBody>
@@ -4592,14 +4835,14 @@
                     <a:p>
                       <a:r>
                         <a:rPr sz="2000" lang="ja-JP">
-                          <a:latin typeface="Noto Sans JP"/>
-                          <a:ea typeface="Noto Sans JP"/>
+                          <a:latin typeface="BIZ UDPGothic"/>
+                          <a:ea typeface="BIZ UDPGothic"/>
                         </a:rPr>
                         <a:t>1,200万円</a:t>
                       </a:r>
                     </a:p>
                   </a:txBody>
-                  <a:tcPr/>
+                  <a:tcPr anchor="ctr"/>
                 </a:tc>
                 <a:tc>
                   <a:txBody>
@@ -4608,14 +4851,14 @@
                     <a:p>
                       <a:r>
                         <a:rPr sz="2000" lang="ja-JP">
-                          <a:latin typeface="Noto Sans JP"/>
-                          <a:ea typeface="Noto Sans JP"/>
+                          <a:latin typeface="BIZ UDPGothic"/>
+                          <a:ea typeface="BIZ UDPGothic"/>
                         </a:rPr>
                         <a:t>1,000万円</a:t>
                       </a:r>
                     </a:p>
                   </a:txBody>
-                  <a:tcPr/>
+                  <a:tcPr anchor="ctr"/>
                 </a:tc>
                 <a:tc>
                   <a:txBody>
@@ -4624,14 +4867,14 @@
                     <a:p>
                       <a:r>
                         <a:rPr sz="2000" lang="ja-JP">
-                          <a:latin typeface="Noto Sans JP"/>
-                          <a:ea typeface="Noto Sans JP"/>
+                          <a:latin typeface="BIZ UDPGothic"/>
+                          <a:ea typeface="BIZ UDPGothic"/>
                         </a:rPr>
                         <a:t>+20%</a:t>
                       </a:r>
                     </a:p>
                   </a:txBody>
-                  <a:tcPr/>
+                  <a:tcPr anchor="ctr"/>
                 </a:tc>
               </a:tr>
               <a:tr h="594360">
@@ -4642,14 +4885,14 @@
                     <a:p>
                       <a:r>
                         <a:rPr sz="2000" lang="ja-JP">
-                          <a:latin typeface="Noto Sans JP"/>
-                          <a:ea typeface="Noto Sans JP"/>
+                          <a:latin typeface="BIZ UDPGothic"/>
+                          <a:ea typeface="BIZ UDPGothic"/>
                         </a:rPr>
                         <a:t>注文</a:t>
                       </a:r>
                     </a:p>
                   </a:txBody>
-                  <a:tcPr/>
+                  <a:tcPr anchor="ctr"/>
                 </a:tc>
                 <a:tc>
                   <a:txBody>
@@ -4658,14 +4901,14 @@
                     <a:p>
                       <a:r>
                         <a:rPr sz="2000" lang="ja-JP">
-                          <a:latin typeface="Noto Sans JP"/>
-                          <a:ea typeface="Noto Sans JP"/>
+                          <a:latin typeface="BIZ UDPGothic"/>
+                          <a:ea typeface="BIZ UDPGothic"/>
                         </a:rPr>
                         <a:t>4,000件</a:t>
                       </a:r>
                     </a:p>
                   </a:txBody>
-                  <a:tcPr/>
+                  <a:tcPr anchor="ctr"/>
                 </a:tc>
                 <a:tc>
                   <a:txBody>
@@ -4674,14 +4917,14 @@
                     <a:p>
                       <a:r>
                         <a:rPr sz="2000" lang="ja-JP">
-                          <a:latin typeface="Noto Sans JP"/>
-                          <a:ea typeface="Noto Sans JP"/>
+                          <a:latin typeface="BIZ UDPGothic"/>
+                          <a:ea typeface="BIZ UDPGothic"/>
                         </a:rPr>
                         <a:t>3,500件</a:t>
                       </a:r>
                     </a:p>
                   </a:txBody>
-                  <a:tcPr/>
+                  <a:tcPr anchor="ctr"/>
                 </a:tc>
                 <a:tc>
                   <a:txBody>
@@ -4690,14 +4933,14 @@
                     <a:p>
                       <a:r>
                         <a:rPr sz="2000" lang="ja-JP">
-                          <a:latin typeface="Noto Sans JP"/>
-                          <a:ea typeface="Noto Sans JP"/>
+                          <a:latin typeface="BIZ UDPGothic"/>
+                          <a:ea typeface="BIZ UDPGothic"/>
                         </a:rPr>
                         <a:t>+500件</a:t>
                       </a:r>
                     </a:p>
                   </a:txBody>
-                  <a:tcPr/>
+                  <a:tcPr anchor="ctr"/>
                 </a:tc>
               </a:tr>
               <a:tr h="594360">
@@ -4708,14 +4951,14 @@
                     <a:p>
                       <a:r>
                         <a:rPr sz="2000" lang="ja-JP">
-                          <a:latin typeface="Noto Sans JP"/>
-                          <a:ea typeface="Noto Sans JP"/>
+                          <a:latin typeface="BIZ UDPGothic"/>
+                          <a:ea typeface="BIZ UDPGothic"/>
                         </a:rPr>
                         <a:t>粗利率</a:t>
                       </a:r>
                     </a:p>
                   </a:txBody>
-                  <a:tcPr/>
+                  <a:tcPr anchor="ctr"/>
                 </a:tc>
                 <a:tc>
                   <a:txBody>
@@ -4724,14 +4967,14 @@
                     <a:p>
                       <a:r>
                         <a:rPr sz="2000" lang="ja-JP">
-                          <a:latin typeface="Noto Sans JP"/>
-                          <a:ea typeface="Noto Sans JP"/>
+                          <a:latin typeface="BIZ UDPGothic"/>
+                          <a:ea typeface="BIZ UDPGothic"/>
                         </a:rPr>
                         <a:t>36%</a:t>
                       </a:r>
                     </a:p>
                   </a:txBody>
-                  <a:tcPr/>
+                  <a:tcPr anchor="ctr"/>
                 </a:tc>
                 <a:tc>
                   <a:txBody>
@@ -4740,14 +4983,14 @@
                     <a:p>
                       <a:r>
                         <a:rPr sz="2000" lang="ja-JP">
-                          <a:latin typeface="Noto Sans JP"/>
-                          <a:ea typeface="Noto Sans JP"/>
+                          <a:latin typeface="BIZ UDPGothic"/>
+                          <a:ea typeface="BIZ UDPGothic"/>
                         </a:rPr>
                         <a:t>38%</a:t>
                       </a:r>
                     </a:p>
                   </a:txBody>
-                  <a:tcPr/>
+                  <a:tcPr anchor="ctr"/>
                 </a:tc>
                 <a:tc>
                   <a:txBody>
@@ -4756,14 +4999,14 @@
                     <a:p>
                       <a:r>
                         <a:rPr sz="2000" lang="ja-JP">
-                          <a:latin typeface="Noto Sans JP"/>
-                          <a:ea typeface="Noto Sans JP"/>
+                          <a:latin typeface="BIZ UDPGothic"/>
+                          <a:ea typeface="BIZ UDPGothic"/>
                         </a:rPr>
                         <a:t>−2ポイント</a:t>
                       </a:r>
                     </a:p>
                   </a:txBody>
-                  <a:tcPr/>
+                  <a:tcPr anchor="ctr"/>
                 </a:tc>
               </a:tr>
               <a:tr h="594360">
@@ -4774,14 +5017,14 @@
                     <a:p>
                       <a:r>
                         <a:rPr sz="2000" lang="ja-JP">
-                          <a:latin typeface="Noto Sans JP"/>
-                          <a:ea typeface="Noto Sans JP"/>
+                          <a:latin typeface="BIZ UDPGothic"/>
+                          <a:ea typeface="BIZ UDPGothic"/>
                         </a:rPr>
                         <a:t>返品率</a:t>
                       </a:r>
                     </a:p>
                   </a:txBody>
-                  <a:tcPr/>
+                  <a:tcPr anchor="ctr"/>
                 </a:tc>
                 <a:tc>
                   <a:txBody>
@@ -4790,14 +5033,14 @@
                     <a:p>
                       <a:r>
                         <a:rPr sz="2000" lang="ja-JP">
-                          <a:latin typeface="Noto Sans JP"/>
-                          <a:ea typeface="Noto Sans JP"/>
+                          <a:latin typeface="BIZ UDPGothic"/>
+                          <a:ea typeface="BIZ UDPGothic"/>
                         </a:rPr>
                         <a:t>6%</a:t>
                       </a:r>
                     </a:p>
                   </a:txBody>
-                  <a:tcPr/>
+                  <a:tcPr anchor="ctr"/>
                 </a:tc>
                 <a:tc>
                   <a:txBody>
@@ -4806,14 +5049,14 @@
                     <a:p>
                       <a:r>
                         <a:rPr sz="2000" lang="ja-JP">
-                          <a:latin typeface="Noto Sans JP"/>
-                          <a:ea typeface="Noto Sans JP"/>
+                          <a:latin typeface="BIZ UDPGothic"/>
+                          <a:ea typeface="BIZ UDPGothic"/>
                         </a:rPr>
                         <a:t>4%</a:t>
                       </a:r>
                     </a:p>
                   </a:txBody>
-                  <a:tcPr/>
+                  <a:tcPr anchor="ctr"/>
                 </a:tc>
                 <a:tc>
                   <a:txBody>
@@ -4822,14 +5065,14 @@
                     <a:p>
                       <a:r>
                         <a:rPr sz="2000" lang="ja-JP">
-                          <a:latin typeface="Noto Sans JP"/>
-                          <a:ea typeface="Noto Sans JP"/>
+                          <a:latin typeface="BIZ UDPGothic"/>
+                          <a:ea typeface="BIZ UDPGothic"/>
                         </a:rPr>
                         <a:t>+2ポイント</a:t>
                       </a:r>
                     </a:p>
                   </a:txBody>
-                  <a:tcPr/>
+                  <a:tcPr anchor="ctr"/>
                 </a:tc>
               </a:tr>
             </a:tbl>
@@ -4863,8 +5106,8 @@
                 <a:solidFill>
                   <a:srgbClr val="202C39"/>
                 </a:solidFill>
-                <a:latin typeface="Noto Sans JP"/>
-                <a:ea typeface="Noto Sans JP"/>
+                <a:latin typeface="BIZ UDPGothic"/>
+                <a:ea typeface="BIZ UDPGothic"/>
               </a:rPr>
               <a:t>粗利額は432万円。売上だけで次の施策を判断しない。</a:t>
             </a:r>
@@ -4916,8 +5159,8 @@
                 <a:solidFill>
                   <a:srgbClr val="202C39"/>
                 </a:solidFill>
-                <a:latin typeface="Noto Sans JP"/>
-                <a:ea typeface="Noto Sans JP"/>
+                <a:latin typeface="BIZ UDPGothic"/>
+                <a:ea typeface="BIZ UDPGothic"/>
               </a:rPr>
               <a:t>売上増200万円の中心は自然検索</a:t>
             </a:r>
@@ -4978,7 +5221,7 @@
         <p:spPr>
           <a:xfrm>
             <a:off x="640080" y="6382512"/>
-            <a:ext cx="9144000" cy="228600"/>
+            <a:ext cx="9144000" cy="320040"/>
           </a:xfrm>
           <a:prstGeom prst="rect">
             <a:avLst/>
@@ -4992,12 +5235,12 @@
           <a:lstStyle/>
           <a:p>
             <a:r>
-              <a:rPr sz="1000" b="0" lang="ja-JP">
+              <a:rPr sz="1300" b="0" lang="ja-JP">
                 <a:solidFill>
                   <a:srgbClr val="202C39"/>
                 </a:solidFill>
-                <a:latin typeface="Noto Sans JP"/>
-                <a:ea typeface="Noto Sans JP"/>
+                <a:latin typeface="BIZ UDPGothic"/>
+                <a:ea typeface="BIZ UDPGothic"/>
               </a:rPr>
               <a:t>架空の組織・数値による制作サンプル</a:t>
             </a:r>
@@ -5013,7 +5256,7 @@
         <p:spPr>
           <a:xfrm>
             <a:off x="10698480" y="6382512"/>
-            <a:ext cx="731520" cy="228600"/>
+            <a:ext cx="731520" cy="320040"/>
           </a:xfrm>
           <a:prstGeom prst="rect">
             <a:avLst/>
@@ -5027,12 +5270,12 @@
           <a:lstStyle/>
           <a:p>
             <a:r>
-              <a:rPr sz="1000" b="0" lang="ja-JP">
+              <a:rPr sz="1300" b="0" lang="ja-JP">
                 <a:solidFill>
                   <a:srgbClr val="202C39"/>
                 </a:solidFill>
-                <a:latin typeface="Noto Sans JP"/>
-                <a:ea typeface="Noto Sans JP"/>
+                <a:latin typeface="BIZ UDPGothic"/>
+                <a:ea typeface="BIZ UDPGothic"/>
               </a:rPr>
               <a:t>3 / 6</a:t>
             </a:r>
@@ -5066,10 +5309,10 @@
                 <a:solidFill>
                   <a:srgbClr val="202C39"/>
                 </a:solidFill>
-                <a:latin typeface="Noto Sans JP"/>
-                <a:ea typeface="Noto Sans JP"/>
+                <a:latin typeface="BIZ UDPGothic"/>
+                <a:ea typeface="BIZ UDPGothic"/>
               </a:rPr>
-              <a:t>青：2025年9月　赤：2026年9月</a:t>
+              <a:t>自然検索が売上増加額の45%を占める（90÷200）</a:t>
             </a:r>
           </a:p>
         </p:txBody>
@@ -5119,8 +5362,8 @@
                 <a:solidFill>
                   <a:srgbClr val="202C39"/>
                 </a:solidFill>
-                <a:latin typeface="Noto Sans JP"/>
-                <a:ea typeface="Noto Sans JP"/>
+                <a:latin typeface="BIZ UDPGothic"/>
+                <a:ea typeface="BIZ UDPGothic"/>
               </a:rPr>
               <a:t>前年差：広告 +20／自然検索 +90／メール +50／直訪 +40万円</a:t>
             </a:r>
@@ -5167,15 +5410,474 @@
           </a:bodyPr>
           <a:lstStyle/>
           <a:p>
+            <a:pPr algn="l">
+              <a:lnSpc>
+                <a:spcPct val="120000"/>
+              </a:lnSpc>
+            </a:pPr>
+            <a:r>
+              <a:rPr sz="3100" b="1" i="0" u="none" lang="ja-JP">
+                <a:solidFill>
+                  <a:srgbClr val="202C39"/>
+                </a:solidFill>
+                <a:latin typeface="BIZ UDPGothic"/>
+                <a:ea typeface="BIZ UDPGothic"/>
+              </a:rPr>
+              <a:t>粗利額は増え、率は2ポイント低下</a:t>
+            </a:r>
+          </a:p>
+        </p:txBody>
+      </p:sp>
+      <p:sp>
+        <p:nvSpPr>
+          <p:cNvPr id="5" name="TextBox 4"/>
+          <p:cNvSpPr txBox="1"/>
+          <p:nvPr/>
+        </p:nvSpPr>
+        <p:spPr>
+          <a:xfrm>
+            <a:off x="609584" y="1536192"/>
+            <a:ext cx="4876678" cy="548640"/>
+          </a:xfrm>
+          <a:prstGeom prst="rect">
+            <a:avLst/>
+          </a:prstGeom>
+          <a:noFill/>
+        </p:spPr>
+        <p:txBody>
+          <a:bodyPr wrap="square">
+            <a:spAutoFit/>
+          </a:bodyPr>
+          <a:lstStyle/>
+          <a:p>
+            <a:pPr algn="ctr">
+              <a:lnSpc>
+                <a:spcPct val="120000"/>
+              </a:lnSpc>
+            </a:pPr>
+            <a:r>
+              <a:rPr sz="2400" b="1" i="0" u="none" lang="ja-JP">
+                <a:solidFill>
+                  <a:srgbClr val="282828"/>
+                </a:solidFill>
+                <a:latin typeface="BIZ UDPGothic"/>
+                <a:ea typeface="BIZ UDPGothic"/>
+              </a:rPr>
+              <a:t>2025年9月（架空）</a:t>
+            </a:r>
+          </a:p>
+        </p:txBody>
+      </p:sp>
+      <p:sp>
+        <p:nvSpPr>
+          <p:cNvPr id="6" name="TextBox 5"/>
+          <p:cNvSpPr txBox="1"/>
+          <p:nvPr/>
+        </p:nvSpPr>
+        <p:spPr>
+          <a:xfrm>
+            <a:off x="609584" y="2103120"/>
+            <a:ext cx="4876678" cy="1554480"/>
+          </a:xfrm>
+          <a:prstGeom prst="rect">
+            <a:avLst/>
+          </a:prstGeom>
+          <a:noFill/>
+        </p:spPr>
+        <p:txBody>
+          <a:bodyPr wrap="square">
+            <a:spAutoFit/>
+          </a:bodyPr>
+          <a:lstStyle/>
+          <a:p>
+            <a:r>
+              <a:rPr b="1" sz="3000" lang="ja-JP">
+                <a:solidFill>
+                  <a:srgbClr val="202C39"/>
+                </a:solidFill>
+                <a:latin typeface="BIZ UDPGothic"/>
+                <a:ea typeface="BIZ UDPGothic"/>
+              </a:rPr>
+              <a:t>売上 1,000万円</a:t>
+            </a:r>
+          </a:p>
+          <a:p>
+            <a:r>
+              <a:rPr b="1" sz="3000" lang="ja-JP">
+                <a:solidFill>
+                  <a:srgbClr val="202C39"/>
+                </a:solidFill>
+                <a:latin typeface="BIZ UDPGothic"/>
+                <a:ea typeface="BIZ UDPGothic"/>
+              </a:rPr>
+              <a:t>粗利率 38%</a:t>
+            </a:r>
+          </a:p>
+          <a:p>
+            <a:r>
+              <a:rPr b="1" sz="3000" lang="ja-JP">
+                <a:solidFill>
+                  <a:srgbClr val="202C39"/>
+                </a:solidFill>
+                <a:latin typeface="BIZ UDPGothic"/>
+                <a:ea typeface="BIZ UDPGothic"/>
+              </a:rPr>
+              <a:t>粗利額 380万円</a:t>
+            </a:r>
+          </a:p>
+        </p:txBody>
+      </p:sp>
+      <p:sp>
+        <p:nvSpPr>
+          <p:cNvPr id="7" name="TextBox 6"/>
+          <p:cNvSpPr txBox="1"/>
+          <p:nvPr/>
+        </p:nvSpPr>
+        <p:spPr>
+          <a:xfrm>
+            <a:off x="6705432" y="1536192"/>
+            <a:ext cx="4876678" cy="548640"/>
+          </a:xfrm>
+          <a:prstGeom prst="rect">
+            <a:avLst/>
+          </a:prstGeom>
+          <a:noFill/>
+        </p:spPr>
+        <p:txBody>
+          <a:bodyPr wrap="square">
+            <a:spAutoFit/>
+          </a:bodyPr>
+          <a:lstStyle/>
+          <a:p>
+            <a:pPr algn="ctr">
+              <a:lnSpc>
+                <a:spcPct val="120000"/>
+              </a:lnSpc>
+            </a:pPr>
+            <a:r>
+              <a:rPr sz="2400" b="1" i="0" u="none" lang="ja-JP">
+                <a:solidFill>
+                  <a:srgbClr val="0078D7"/>
+                </a:solidFill>
+                <a:latin typeface="BIZ UDPGothic"/>
+                <a:ea typeface="BIZ UDPGothic"/>
+              </a:rPr>
+              <a:t>2026年9月（架空）</a:t>
+            </a:r>
+          </a:p>
+        </p:txBody>
+      </p:sp>
+      <p:sp>
+        <p:nvSpPr>
+          <p:cNvPr id="8" name="TextBox 7"/>
+          <p:cNvSpPr txBox="1"/>
+          <p:nvPr/>
+        </p:nvSpPr>
+        <p:spPr>
+          <a:xfrm>
+            <a:off x="6705432" y="2103120"/>
+            <a:ext cx="4876678" cy="1554480"/>
+          </a:xfrm>
+          <a:prstGeom prst="rect">
+            <a:avLst/>
+          </a:prstGeom>
+          <a:noFill/>
+        </p:spPr>
+        <p:txBody>
+          <a:bodyPr wrap="square">
+            <a:spAutoFit/>
+          </a:bodyPr>
+          <a:lstStyle/>
+          <a:p>
+            <a:r>
+              <a:rPr b="1" sz="3000" lang="ja-JP">
+                <a:solidFill>
+                  <a:srgbClr val="202C39"/>
+                </a:solidFill>
+                <a:latin typeface="BIZ UDPGothic"/>
+                <a:ea typeface="BIZ UDPGothic"/>
+              </a:rPr>
+              <a:t>売上 1,200万円</a:t>
+            </a:r>
+          </a:p>
+          <a:p>
+            <a:r>
+              <a:rPr b="1" sz="3000" lang="ja-JP">
+                <a:solidFill>
+                  <a:srgbClr val="202C39"/>
+                </a:solidFill>
+                <a:latin typeface="BIZ UDPGothic"/>
+                <a:ea typeface="BIZ UDPGothic"/>
+              </a:rPr>
+              <a:t>粗利率 36%</a:t>
+            </a:r>
+          </a:p>
+          <a:p>
+            <a:r>
+              <a:rPr b="1" sz="3000" lang="ja-JP">
+                <a:solidFill>
+                  <a:srgbClr val="202C39"/>
+                </a:solidFill>
+                <a:latin typeface="BIZ UDPGothic"/>
+                <a:ea typeface="BIZ UDPGothic"/>
+              </a:rPr>
+              <a:t>粗利額 432万円</a:t>
+            </a:r>
+          </a:p>
+        </p:txBody>
+      </p:sp>
+      <p:sp>
+        <p:nvSpPr>
+          <p:cNvPr id="10" name="TextBox 9"/>
+          <p:cNvSpPr txBox="1"/>
+          <p:nvPr/>
+        </p:nvSpPr>
+        <p:spPr>
+          <a:xfrm>
+            <a:off x="777240" y="5833872"/>
+            <a:ext cx="10789920" cy="365760"/>
+          </a:xfrm>
+          <a:prstGeom prst="rect">
+            <a:avLst/>
+          </a:prstGeom>
+          <a:noFill/>
+        </p:spPr>
+        <p:txBody>
+          <a:bodyPr wrap="square">
+            <a:spAutoFit/>
+          </a:bodyPr>
+          <a:lstStyle/>
+          <a:p>
+            <a:r>
+              <a:rPr b="1" i="0" sz="2100" lang="ja-JP">
+                <a:solidFill>
+                  <a:srgbClr val="1C4A67"/>
+                </a:solidFill>
+                <a:latin typeface="BIZ UDPGothic"/>
+                <a:ea typeface="BIZ UDPGothic"/>
+              </a:rPr>
+              <a:t>額+52万円／率−2ポイント</a:t>
+            </a:r>
+          </a:p>
+        </p:txBody>
+      </p:sp>
+      <p:sp>
+        <p:nvSpPr>
+          <p:cNvPr id="11" name="TextBox 10"/>
+          <p:cNvSpPr txBox="1"/>
+          <p:nvPr/>
+        </p:nvSpPr>
+        <p:spPr>
+          <a:xfrm>
+            <a:off x="853418" y="3794760"/>
+            <a:ext cx="10484857" cy="274320"/>
+          </a:xfrm>
+          <a:prstGeom prst="rect">
+            <a:avLst/>
+          </a:prstGeom>
+          <a:noFill/>
+        </p:spPr>
+        <p:txBody>
+          <a:bodyPr wrap="square">
+            <a:spAutoFit/>
+          </a:bodyPr>
+          <a:lstStyle/>
+          <a:p>
+            <a:r>
+              <a:rPr sz="1500" b="1" lang="ja-JP">
+                <a:solidFill>
+                  <a:srgbClr val="202C39"/>
+                </a:solidFill>
+                <a:latin typeface="BIZ UDPGothic"/>
+                <a:ea typeface="BIZ UDPGothic"/>
+              </a:rPr>
+              <a:t>前年差（万円）</a:t>
+            </a:r>
+          </a:p>
+        </p:txBody>
+      </p:sp>
+      <p:graphicFrame>
+        <p:nvGraphicFramePr>
+          <p:cNvPr id="12" name="Chart 11"/>
+          <p:cNvGraphicFramePr>
+            <a:graphicFrameLocks noGrp="1"/>
+          </p:cNvGraphicFramePr>
+          <p:nvPr/>
+        </p:nvGraphicFramePr>
+        <p:xfrm>
+          <a:off x="853418" y="4114800"/>
+          <a:ext cx="10484857" cy="1325880"/>
+        </p:xfrm>
+        <a:graphic>
+          <a:graphicData uri="http://schemas.openxmlformats.org/drawingml/2006/chart">
+            <c:chart xmlns:c="http://schemas.openxmlformats.org/drawingml/2006/chart" r:id="rId2"/>
+          </a:graphicData>
+        </a:graphic>
+      </p:graphicFrame>
+      <p:sp>
+        <p:nvSpPr>
+          <p:cNvPr id="13" name="Rectangle 12"/>
+          <p:cNvSpPr/>
+          <p:nvPr/>
+        </p:nvSpPr>
+        <p:spPr>
+          <a:xfrm>
+            <a:off x="640079" y="1298448"/>
+            <a:ext cx="10881359" cy="32004"/>
+          </a:xfrm>
+          <a:prstGeom prst="rect">
+            <a:avLst/>
+          </a:prstGeom>
+          <a:solidFill>
+            <a:srgbClr val="1C6796"/>
+          </a:solidFill>
+          <a:ln>
+            <a:solidFill>
+              <a:srgbClr val="1C6796"/>
+            </a:solidFill>
+          </a:ln>
+        </p:spPr>
+        <p:style>
+          <a:lnRef idx="1">
+            <a:schemeClr val="accent1"/>
+          </a:lnRef>
+          <a:fillRef idx="3">
+            <a:schemeClr val="accent1"/>
+          </a:fillRef>
+          <a:effectRef idx="2">
+            <a:schemeClr val="accent1"/>
+          </a:effectRef>
+          <a:fontRef idx="minor">
+            <a:schemeClr val="lt1"/>
+          </a:fontRef>
+        </p:style>
+        <p:txBody>
+          <a:bodyPr rtlCol="0" anchor="ctr"/>
+          <a:lstStyle/>
+          <a:p>
+            <a:pPr algn="ctr"/>
+          </a:p>
+        </p:txBody>
+      </p:sp>
+      <p:sp>
+        <p:nvSpPr>
+          <p:cNvPr id="14" name="TextBox 13"/>
+          <p:cNvSpPr txBox="1"/>
+          <p:nvPr/>
+        </p:nvSpPr>
+        <p:spPr>
+          <a:xfrm>
+            <a:off x="640079" y="6382512"/>
+            <a:ext cx="9143999" cy="320040"/>
+          </a:xfrm>
+          <a:prstGeom prst="rect">
+            <a:avLst/>
+          </a:prstGeom>
+          <a:noFill/>
+        </p:spPr>
+        <p:txBody>
+          <a:bodyPr wrap="square">
+            <a:spAutoFit/>
+          </a:bodyPr>
+          <a:lstStyle/>
+          <a:p>
+            <a:r>
+              <a:rPr sz="1300" b="0" lang="ja-JP">
+                <a:solidFill>
+                  <a:srgbClr val="202C39"/>
+                </a:solidFill>
+                <a:latin typeface="BIZ UDPGothic"/>
+                <a:ea typeface="BIZ UDPGothic"/>
+              </a:rPr>
+              <a:t>架空の組織・数値による制作サンプル</a:t>
+            </a:r>
+          </a:p>
+        </p:txBody>
+      </p:sp>
+      <p:sp>
+        <p:nvSpPr>
+          <p:cNvPr id="15" name="TextBox 14"/>
+          <p:cNvSpPr txBox="1"/>
+          <p:nvPr/>
+        </p:nvSpPr>
+        <p:spPr>
+          <a:xfrm>
+            <a:off x="10698479" y="6382512"/>
+            <a:ext cx="731519" cy="320040"/>
+          </a:xfrm>
+          <a:prstGeom prst="rect">
+            <a:avLst/>
+          </a:prstGeom>
+          <a:noFill/>
+        </p:spPr>
+        <p:txBody>
+          <a:bodyPr wrap="square">
+            <a:spAutoFit/>
+          </a:bodyPr>
+          <a:lstStyle/>
+          <a:p>
+            <a:r>
+              <a:rPr sz="1300" b="0" lang="ja-JP">
+                <a:solidFill>
+                  <a:srgbClr val="202C39"/>
+                </a:solidFill>
+                <a:latin typeface="BIZ UDPGothic"/>
+                <a:ea typeface="BIZ UDPGothic"/>
+              </a:rPr>
+              <a:t>4 / 6</a:t>
+            </a:r>
+          </a:p>
+        </p:txBody>
+      </p:sp>
+    </p:spTree>
+  </p:cSld>
+  <p:clrMapOvr>
+    <a:masterClrMapping/>
+  </p:clrMapOvr>
+</p:sld>
+</file>
+
+<file path=ppt/slides/slide5.xml><?xml version="1.0" encoding="utf-8"?>
+<p:sld xmlns:a="http://schemas.openxmlformats.org/drawingml/2006/main" xmlns:p="http://schemas.openxmlformats.org/presentationml/2006/main" xmlns:r="http://schemas.openxmlformats.org/officeDocument/2006/relationships">
+  <p:cSld>
+    <p:spTree>
+      <p:nvGrpSpPr>
+        <p:cNvPr id="1" name=""/>
+        <p:cNvGrpSpPr/>
+        <p:nvPr/>
+      </p:nvGrpSpPr>
+      <p:grpSpPr/>
+      <p:sp>
+        <p:nvSpPr>
+          <p:cNvPr id="2" name="TextBox 1"/>
+          <p:cNvSpPr txBox="1"/>
+          <p:nvPr/>
+        </p:nvSpPr>
+        <p:spPr>
+          <a:xfrm>
+            <a:off x="594360" y="365760"/>
+            <a:ext cx="10972800" cy="914400"/>
+          </a:xfrm>
+          <a:prstGeom prst="rect">
+            <a:avLst/>
+          </a:prstGeom>
+          <a:noFill/>
+        </p:spPr>
+        <p:txBody>
+          <a:bodyPr wrap="square">
+            <a:spAutoFit/>
+          </a:bodyPr>
+          <a:lstStyle/>
+          <a:p>
             <a:r>
               <a:rPr sz="3100" b="1" lang="ja-JP">
                 <a:solidFill>
                   <a:srgbClr val="202C39"/>
                 </a:solidFill>
-                <a:latin typeface="Noto Sans JP"/>
-                <a:ea typeface="Noto Sans JP"/>
+                <a:latin typeface="BIZ UDPGothic"/>
+                <a:ea typeface="BIZ UDPGothic"/>
               </a:rPr>
-              <a:t>粗利額は増え、率は2ポイント低下</a:t>
+              <a:t>返品理由の分類と商品説明を先行</a:t>
             </a:r>
           </a:p>
         </p:txBody>
@@ -5234,7 +5936,7 @@
         <p:spPr>
           <a:xfrm>
             <a:off x="640080" y="6382512"/>
-            <a:ext cx="9144000" cy="228600"/>
+            <a:ext cx="9144000" cy="320040"/>
           </a:xfrm>
           <a:prstGeom prst="rect">
             <a:avLst/>
@@ -5248,12 +5950,12 @@
           <a:lstStyle/>
           <a:p>
             <a:r>
-              <a:rPr sz="1000" b="0" lang="ja-JP">
+              <a:rPr sz="1300" b="0" lang="ja-JP">
                 <a:solidFill>
                   <a:srgbClr val="202C39"/>
                 </a:solidFill>
-                <a:latin typeface="Noto Sans JP"/>
-                <a:ea typeface="Noto Sans JP"/>
+                <a:latin typeface="BIZ UDPGothic"/>
+                <a:ea typeface="BIZ UDPGothic"/>
               </a:rPr>
               <a:t>架空の組織・数値による制作サンプル</a:t>
             </a:r>
@@ -5269,7 +5971,7 @@
         <p:spPr>
           <a:xfrm>
             <a:off x="10698480" y="6382512"/>
-            <a:ext cx="731520" cy="228600"/>
+            <a:ext cx="731520" cy="320040"/>
           </a:xfrm>
           <a:prstGeom prst="rect">
             <a:avLst/>
@@ -5283,28 +5985,267 @@
           <a:lstStyle/>
           <a:p>
             <a:r>
-              <a:rPr sz="1000" b="0" lang="ja-JP">
+              <a:rPr sz="1300" b="0" lang="ja-JP">
                 <a:solidFill>
                   <a:srgbClr val="202C39"/>
                 </a:solidFill>
-                <a:latin typeface="Noto Sans JP"/>
-                <a:ea typeface="Noto Sans JP"/>
+                <a:latin typeface="BIZ UDPGothic"/>
+                <a:ea typeface="BIZ UDPGothic"/>
               </a:rPr>
-              <a:t>4 / 6</a:t>
-            </a:r>
-          </a:p>
-        </p:txBody>
-      </p:sp>
-      <p:sp>
-        <p:nvSpPr>
-          <p:cNvPr id="6" name="TextBox 5"/>
+              <a:t>5 / 6</a:t>
+            </a:r>
+          </a:p>
+        </p:txBody>
+      </p:sp>
+      <p:graphicFrame>
+        <p:nvGraphicFramePr>
+          <p:cNvPr id="6" name="Table 5"/>
+          <p:cNvGraphicFramePr>
+            <a:graphicFrameLocks noGrp="1"/>
+          </p:cNvGraphicFramePr>
+          <p:nvPr/>
+        </p:nvGraphicFramePr>
+        <p:xfrm>
+          <a:off x="731520" y="1828800"/>
+          <a:ext cx="10698480" cy="3291840"/>
+        </p:xfrm>
+        <a:graphic>
+          <a:graphicData uri="http://schemas.openxmlformats.org/drawingml/2006/table">
+            <a:tbl>
+              <a:tblPr firstRow="1" bandRow="1">
+                <a:tableStyleId>{5C22544A-7EE6-4342-B048-85BDC9FD1C3A}</a:tableStyleId>
+              </a:tblPr>
+              <a:tblGrid>
+                <a:gridCol w="3566160"/>
+                <a:gridCol w="3566160"/>
+                <a:gridCol w="3566160"/>
+              </a:tblGrid>
+              <a:tr h="822960">
+                <a:tc>
+                  <a:txBody>
+                    <a:bodyPr wrap="square"/>
+                    <a:lstStyle/>
+                    <a:p>
+                      <a:r>
+                        <a:rPr sz="2000" b="1" lang="ja-JP">
+                          <a:latin typeface="BIZ UDPGothic"/>
+                          <a:ea typeface="BIZ UDPGothic"/>
+                        </a:rPr>
+                        <a:t>期限</a:t>
+                      </a:r>
+                    </a:p>
+                  </a:txBody>
+                  <a:tcPr anchor="ctr">
+                    <a:solidFill>
+                      <a:srgbClr val="1C6796"/>
+                    </a:solidFill>
+                  </a:tcPr>
+                </a:tc>
+                <a:tc>
+                  <a:txBody>
+                    <a:bodyPr wrap="square"/>
+                    <a:lstStyle/>
+                    <a:p>
+                      <a:r>
+                        <a:rPr sz="2000" b="1" lang="ja-JP">
+                          <a:latin typeface="BIZ UDPGothic"/>
+                          <a:ea typeface="BIZ UDPGothic"/>
+                        </a:rPr>
+                        <a:t>担当</a:t>
+                      </a:r>
+                    </a:p>
+                  </a:txBody>
+                  <a:tcPr anchor="ctr">
+                    <a:solidFill>
+                      <a:srgbClr val="1C6796"/>
+                    </a:solidFill>
+                  </a:tcPr>
+                </a:tc>
+                <a:tc>
+                  <a:txBody>
+                    <a:bodyPr wrap="square"/>
+                    <a:lstStyle/>
+                    <a:p>
+                      <a:r>
+                        <a:rPr sz="2000" b="1" lang="ja-JP">
+                          <a:latin typeface="BIZ UDPGothic"/>
+                          <a:ea typeface="BIZ UDPGothic"/>
+                        </a:rPr>
+                        <a:t>確認する作業</a:t>
+                      </a:r>
+                    </a:p>
+                  </a:txBody>
+                  <a:tcPr anchor="ctr">
+                    <a:solidFill>
+                      <a:srgbClr val="1C6796"/>
+                    </a:solidFill>
+                  </a:tcPr>
+                </a:tc>
+              </a:tr>
+              <a:tr h="822960">
+                <a:tc>
+                  <a:txBody>
+                    <a:bodyPr wrap="square"/>
+                    <a:lstStyle/>
+                    <a:p>
+                      <a:r>
+                        <a:rPr sz="1800" lang="ja-JP">
+                          <a:latin typeface="BIZ UDPGothic"/>
+                          <a:ea typeface="BIZ UDPGothic"/>
+                        </a:rPr>
+                        <a:t>10/09</a:t>
+                      </a:r>
+                    </a:p>
+                  </a:txBody>
+                  <a:tcPr anchor="ctr"/>
+                </a:tc>
+                <a:tc>
+                  <a:txBody>
+                    <a:bodyPr wrap="square"/>
+                    <a:lstStyle/>
+                    <a:p>
+                      <a:r>
+                        <a:rPr sz="1800" lang="ja-JP">
+                          <a:latin typeface="BIZ UDPGothic"/>
+                          <a:ea typeface="BIZ UDPGothic"/>
+                        </a:rPr>
+                        <a:t>CS・森</a:t>
+                      </a:r>
+                    </a:p>
+                  </a:txBody>
+                  <a:tcPr anchor="ctr"/>
+                </a:tc>
+                <a:tc>
+                  <a:txBody>
+                    <a:bodyPr wrap="square"/>
+                    <a:lstStyle/>
+                    <a:p>
+                      <a:r>
+                        <a:rPr sz="1800" lang="ja-JP">
+                          <a:latin typeface="BIZ UDPGothic"/>
+                          <a:ea typeface="BIZ UDPGothic"/>
+                        </a:rPr>
+                        <a:t>上位20商品の返品理由を分類</a:t>
+                      </a:r>
+                    </a:p>
+                  </a:txBody>
+                  <a:tcPr anchor="ctr"/>
+                </a:tc>
+              </a:tr>
+              <a:tr h="822960">
+                <a:tc>
+                  <a:txBody>
+                    <a:bodyPr wrap="square"/>
+                    <a:lstStyle/>
+                    <a:p>
+                      <a:r>
+                        <a:rPr sz="1800" lang="ja-JP">
+                          <a:latin typeface="BIZ UDPGothic"/>
+                          <a:ea typeface="BIZ UDPGothic"/>
+                        </a:rPr>
+                        <a:t>10/16</a:t>
+                      </a:r>
+                    </a:p>
+                  </a:txBody>
+                  <a:tcPr anchor="ctr"/>
+                </a:tc>
+                <a:tc>
+                  <a:txBody>
+                    <a:bodyPr wrap="square"/>
+                    <a:lstStyle/>
+                    <a:p>
+                      <a:r>
+                        <a:rPr sz="1800" lang="ja-JP">
+                          <a:latin typeface="BIZ UDPGothic"/>
+                          <a:ea typeface="BIZ UDPGothic"/>
+                        </a:rPr>
+                        <a:t>商品・青木</a:t>
+                      </a:r>
+                    </a:p>
+                  </a:txBody>
+                  <a:tcPr anchor="ctr"/>
+                </a:tc>
+                <a:tc>
+                  <a:txBody>
+                    <a:bodyPr wrap="square"/>
+                    <a:lstStyle/>
+                    <a:p>
+                      <a:r>
+                        <a:rPr sz="1800" lang="ja-JP">
+                          <a:latin typeface="BIZ UDPGothic"/>
+                          <a:ea typeface="BIZ UDPGothic"/>
+                        </a:rPr>
+                        <a:t>返品上位5商品の説明を改稿</a:t>
+                      </a:r>
+                    </a:p>
+                  </a:txBody>
+                  <a:tcPr anchor="ctr"/>
+                </a:tc>
+              </a:tr>
+              <a:tr h="822960">
+                <a:tc>
+                  <a:txBody>
+                    <a:bodyPr wrap="square"/>
+                    <a:lstStyle/>
+                    <a:p>
+                      <a:r>
+                        <a:rPr sz="1800" lang="ja-JP">
+                          <a:latin typeface="BIZ UDPGothic"/>
+                          <a:ea typeface="BIZ UDPGothic"/>
+                        </a:rPr>
+                        <a:t>10/16</a:t>
+                      </a:r>
+                    </a:p>
+                  </a:txBody>
+                  <a:tcPr anchor="ctr"/>
+                </a:tc>
+                <a:tc>
+                  <a:txBody>
+                    <a:bodyPr wrap="square"/>
+                    <a:lstStyle/>
+                    <a:p>
+                      <a:r>
+                        <a:rPr sz="1800" lang="ja-JP">
+                          <a:latin typeface="BIZ UDPGothic"/>
+                          <a:ea typeface="BIZ UDPGothic"/>
+                        </a:rPr>
+                        <a:t>販売・山田</a:t>
+                      </a:r>
+                    </a:p>
+                  </a:txBody>
+                  <a:tcPr anchor="ctr"/>
+                </a:tc>
+                <a:tc>
+                  <a:txBody>
+                    <a:bodyPr wrap="square"/>
+                    <a:lstStyle/>
+                    <a:p>
+                      <a:r>
+                        <a:rPr sz="1800" lang="ja-JP">
+                          <a:latin typeface="BIZ UDPGothic"/>
+                          <a:ea typeface="BIZ UDPGothic"/>
+                        </a:rPr>
+                        <a:t>粗利率の差分を商品別に分析</a:t>
+                      </a:r>
+                    </a:p>
+                  </a:txBody>
+                  <a:tcPr anchor="ctr"/>
+                </a:tc>
+              </a:tr>
+            </a:tbl>
+          </a:graphicData>
+        </a:graphic>
+      </p:graphicFrame>
+      <p:sp>
+        <p:nvSpPr>
+          <p:cNvPr id="7" name="TextBox 6"/>
           <p:cNvSpPr txBox="1"/>
           <p:nvPr/>
         </p:nvSpPr>
         <p:spPr>
           <a:xfrm>
-            <a:off x="822960" y="1828800"/>
-            <a:ext cx="4937760" cy="731520"/>
+            <a:off x="777240" y="5577840"/>
+            <a:ext cx="10515600" cy="502920"/>
           </a:xfrm>
           <a:prstGeom prst="rect">
             <a:avLst/>
@@ -5318,166 +6259,14 @@
           <a:lstStyle/>
           <a:p>
             <a:r>
-              <a:rPr sz="3400" b="1" lang="ja-JP">
-                <a:solidFill>
-                  <a:srgbClr val="202C39"/>
-                </a:solidFill>
-                <a:latin typeface="Noto Sans JP"/>
-                <a:ea typeface="Noto Sans JP"/>
-              </a:rPr>
-              <a:t>前年 380万円</a:t>
-            </a:r>
-          </a:p>
-        </p:txBody>
-      </p:sp>
-      <p:sp>
-        <p:nvSpPr>
-          <p:cNvPr id="7" name="TextBox 6"/>
-          <p:cNvSpPr txBox="1"/>
-          <p:nvPr/>
-        </p:nvSpPr>
-        <p:spPr>
-          <a:xfrm>
-            <a:off x="822960" y="2743200"/>
-            <a:ext cx="4937760" cy="548640"/>
-          </a:xfrm>
-          <a:prstGeom prst="rect">
-            <a:avLst/>
-          </a:prstGeom>
-          <a:noFill/>
-        </p:spPr>
-        <p:txBody>
-          <a:bodyPr wrap="square">
-            <a:spAutoFit/>
-          </a:bodyPr>
-          <a:lstStyle/>
-          <a:p>
-            <a:r>
-              <a:rPr sz="2400" b="0" lang="ja-JP">
-                <a:solidFill>
-                  <a:srgbClr val="202C39"/>
-                </a:solidFill>
-                <a:latin typeface="Noto Sans JP"/>
-                <a:ea typeface="Noto Sans JP"/>
-              </a:rPr>
-              <a:t>1,000万円 × 38%</a:t>
-            </a:r>
-          </a:p>
-        </p:txBody>
-      </p:sp>
-      <p:sp>
-        <p:nvSpPr>
-          <p:cNvPr id="8" name="TextBox 7"/>
-          <p:cNvSpPr txBox="1"/>
-          <p:nvPr/>
-        </p:nvSpPr>
-        <p:spPr>
-          <a:xfrm>
-            <a:off x="6400800" y="1828800"/>
-            <a:ext cx="4937760" cy="731520"/>
-          </a:xfrm>
-          <a:prstGeom prst="rect">
-            <a:avLst/>
-          </a:prstGeom>
-          <a:noFill/>
-        </p:spPr>
-        <p:txBody>
-          <a:bodyPr wrap="square">
-            <a:spAutoFit/>
-          </a:bodyPr>
-          <a:lstStyle/>
-          <a:p>
-            <a:r>
-              <a:rPr sz="3400" b="1" lang="ja-JP">
+              <a:rPr sz="2200" b="1" lang="ja-JP">
                 <a:solidFill>
                   <a:srgbClr val="1C6796"/>
                 </a:solidFill>
-                <a:latin typeface="Noto Sans JP"/>
-                <a:ea typeface="Noto Sans JP"/>
+                <a:latin typeface="BIZ UDPGothic"/>
+                <a:ea typeface="BIZ UDPGothic"/>
               </a:rPr>
-              <a:t>当月 432万円</a:t>
-            </a:r>
-          </a:p>
-        </p:txBody>
-      </p:sp>
-      <p:sp>
-        <p:nvSpPr>
-          <p:cNvPr id="9" name="TextBox 8"/>
-          <p:cNvSpPr txBox="1"/>
-          <p:nvPr/>
-        </p:nvSpPr>
-        <p:spPr>
-          <a:xfrm>
-            <a:off x="6400800" y="2743200"/>
-            <a:ext cx="4937760" cy="548640"/>
-          </a:xfrm>
-          <a:prstGeom prst="rect">
-            <a:avLst/>
-          </a:prstGeom>
-          <a:noFill/>
-        </p:spPr>
-        <p:txBody>
-          <a:bodyPr wrap="square">
-            <a:spAutoFit/>
-          </a:bodyPr>
-          <a:lstStyle/>
-          <a:p>
-            <a:r>
-              <a:rPr sz="2400" b="0" lang="ja-JP">
-                <a:solidFill>
-                  <a:srgbClr val="202C39"/>
-                </a:solidFill>
-                <a:latin typeface="Noto Sans JP"/>
-                <a:ea typeface="Noto Sans JP"/>
-              </a:rPr>
-              <a:t>1,200万円 × 36%</a:t>
-            </a:r>
-          </a:p>
-        </p:txBody>
-      </p:sp>
-      <p:sp>
-        <p:nvSpPr>
-          <p:cNvPr id="10" name="TextBox 9"/>
-          <p:cNvSpPr txBox="1"/>
-          <p:nvPr/>
-        </p:nvSpPr>
-        <p:spPr>
-          <a:xfrm>
-            <a:off x="868680" y="4206240"/>
-            <a:ext cx="10515600" cy="1234440"/>
-          </a:xfrm>
-          <a:prstGeom prst="rect">
-            <a:avLst/>
-          </a:prstGeom>
-          <a:noFill/>
-        </p:spPr>
-        <p:txBody>
-          <a:bodyPr wrap="square">
-            <a:spAutoFit/>
-          </a:bodyPr>
-          <a:lstStyle/>
-          <a:p>
-            <a:r>
-              <a:rPr sz="2500" b="0" lang="ja-JP">
-                <a:solidFill>
-                  <a:srgbClr val="202C39"/>
-                </a:solidFill>
-                <a:latin typeface="Noto Sans JP"/>
-                <a:ea typeface="Noto Sans JP"/>
-              </a:rPr>
-              <a:t>粗利額は52万円増加。</a:t>
-            </a:r>
-          </a:p>
-          <a:p>
-            <a:r>
-              <a:rPr sz="2500" b="0" lang="ja-JP">
-                <a:solidFill>
-                  <a:srgbClr val="202C39"/>
-                </a:solidFill>
-                <a:latin typeface="Noto Sans JP"/>
-                <a:ea typeface="Noto Sans JP"/>
-              </a:rPr>
-              <a:t>値引き・商品構成の影響は、商品別に確認する。</a:t>
+              <a:t>分類結果を商品担当へ渡し、改稿対象を決める。</a:t>
             </a:r>
           </a:p>
         </p:txBody>
@@ -5490,7 +6279,7 @@
 </p:sld>
 </file>
 
-<file path=ppt/slides/slide5.xml><?xml version="1.0" encoding="utf-8"?>
+<file path=ppt/slides/slide6.xml><?xml version="1.0" encoding="utf-8"?>
 <p:sld xmlns:a="http://schemas.openxmlformats.org/drawingml/2006/main" xmlns:p="http://schemas.openxmlformats.org/presentationml/2006/main" xmlns:r="http://schemas.openxmlformats.org/officeDocument/2006/relationships">
   <p:cSld>
     <p:spTree>
@@ -5527,10 +6316,10 @@
                 <a:solidFill>
                   <a:srgbClr val="202C39"/>
                 </a:solidFill>
-                <a:latin typeface="Noto Sans JP"/>
-                <a:ea typeface="Noto Sans JP"/>
+                <a:latin typeface="BIZ UDPGothic"/>
+                <a:ea typeface="BIZ UDPGothic"/>
               </a:rPr>
-              <a:t>返品理由の分類と商品説明を先行</a:t>
+              <a:t>次回は施策の完了と利益要因を確認</a:t>
             </a:r>
           </a:p>
         </p:txBody>
@@ -5589,7 +6378,7 @@
         <p:spPr>
           <a:xfrm>
             <a:off x="640080" y="6382512"/>
-            <a:ext cx="9144000" cy="228600"/>
+            <a:ext cx="9144000" cy="320040"/>
           </a:xfrm>
           <a:prstGeom prst="rect">
             <a:avLst/>
@@ -5603,12 +6392,12 @@
           <a:lstStyle/>
           <a:p>
             <a:r>
-              <a:rPr sz="1000" b="0" lang="ja-JP">
+              <a:rPr sz="1300" b="0" lang="ja-JP">
                 <a:solidFill>
                   <a:srgbClr val="202C39"/>
                 </a:solidFill>
-                <a:latin typeface="Noto Sans JP"/>
-                <a:ea typeface="Noto Sans JP"/>
+                <a:latin typeface="BIZ UDPGothic"/>
+                <a:ea typeface="BIZ UDPGothic"/>
               </a:rPr>
               <a:t>架空の組織・数値による制作サンプル</a:t>
             </a:r>
@@ -5624,7 +6413,7 @@
         <p:spPr>
           <a:xfrm>
             <a:off x="10698480" y="6382512"/>
-            <a:ext cx="731520" cy="228600"/>
+            <a:ext cx="731520" cy="320040"/>
           </a:xfrm>
           <a:prstGeom prst="rect">
             <a:avLst/>
@@ -5638,285 +6427,28 @@
           <a:lstStyle/>
           <a:p>
             <a:r>
-              <a:rPr sz="1000" b="0" lang="ja-JP">
+              <a:rPr sz="1300" b="0" lang="ja-JP">
                 <a:solidFill>
                   <a:srgbClr val="202C39"/>
                 </a:solidFill>
-                <a:latin typeface="Noto Sans JP"/>
-                <a:ea typeface="Noto Sans JP"/>
+                <a:latin typeface="BIZ UDPGothic"/>
+                <a:ea typeface="BIZ UDPGothic"/>
               </a:rPr>
-              <a:t>5 / 6</a:t>
-            </a:r>
-          </a:p>
-        </p:txBody>
-      </p:sp>
-      <p:graphicFrame>
-        <p:nvGraphicFramePr>
-          <p:cNvPr id="6" name="Table 5"/>
-          <p:cNvGraphicFramePr>
-            <a:graphicFrameLocks noGrp="1"/>
-          </p:cNvGraphicFramePr>
-          <p:nvPr/>
-        </p:nvGraphicFramePr>
-        <p:xfrm>
-          <a:off x="731520" y="1828800"/>
-          <a:ext cx="10698480" cy="3291840"/>
-        </p:xfrm>
-        <a:graphic>
-          <a:graphicData uri="http://schemas.openxmlformats.org/drawingml/2006/table">
-            <a:tbl>
-              <a:tblPr firstRow="1" bandRow="1">
-                <a:tableStyleId>{5C22544A-7EE6-4342-B048-85BDC9FD1C3A}</a:tableStyleId>
-              </a:tblPr>
-              <a:tblGrid>
-                <a:gridCol w="3566160"/>
-                <a:gridCol w="3566160"/>
-                <a:gridCol w="3566160"/>
-              </a:tblGrid>
-              <a:tr h="822960">
-                <a:tc>
-                  <a:txBody>
-                    <a:bodyPr wrap="square"/>
-                    <a:lstStyle/>
-                    <a:p>
-                      <a:r>
-                        <a:rPr sz="2000" b="1" lang="ja-JP">
-                          <a:latin typeface="Noto Sans JP"/>
-                          <a:ea typeface="Noto Sans JP"/>
-                        </a:rPr>
-                        <a:t>期限</a:t>
-                      </a:r>
-                    </a:p>
-                  </a:txBody>
-                  <a:tcPr>
-                    <a:solidFill>
-                      <a:srgbClr val="1C6796"/>
-                    </a:solidFill>
-                  </a:tcPr>
-                </a:tc>
-                <a:tc>
-                  <a:txBody>
-                    <a:bodyPr wrap="square"/>
-                    <a:lstStyle/>
-                    <a:p>
-                      <a:r>
-                        <a:rPr sz="2000" b="1" lang="ja-JP">
-                          <a:latin typeface="Noto Sans JP"/>
-                          <a:ea typeface="Noto Sans JP"/>
-                        </a:rPr>
-                        <a:t>担当</a:t>
-                      </a:r>
-                    </a:p>
-                  </a:txBody>
-                  <a:tcPr>
-                    <a:solidFill>
-                      <a:srgbClr val="1C6796"/>
-                    </a:solidFill>
-                  </a:tcPr>
-                </a:tc>
-                <a:tc>
-                  <a:txBody>
-                    <a:bodyPr wrap="square"/>
-                    <a:lstStyle/>
-                    <a:p>
-                      <a:r>
-                        <a:rPr sz="2000" b="1" lang="ja-JP">
-                          <a:latin typeface="Noto Sans JP"/>
-                          <a:ea typeface="Noto Sans JP"/>
-                        </a:rPr>
-                        <a:t>確認する作業</a:t>
-                      </a:r>
-                    </a:p>
-                  </a:txBody>
-                  <a:tcPr>
-                    <a:solidFill>
-                      <a:srgbClr val="1C6796"/>
-                    </a:solidFill>
-                  </a:tcPr>
-                </a:tc>
-              </a:tr>
-              <a:tr h="822960">
-                <a:tc>
-                  <a:txBody>
-                    <a:bodyPr wrap="square"/>
-                    <a:lstStyle/>
-                    <a:p>
-                      <a:r>
-                        <a:rPr sz="1800" lang="ja-JP">
-                          <a:latin typeface="Noto Sans JP"/>
-                          <a:ea typeface="Noto Sans JP"/>
-                        </a:rPr>
-                        <a:t>10/09</a:t>
-                      </a:r>
-                    </a:p>
-                  </a:txBody>
-                  <a:tcPr/>
-                </a:tc>
-                <a:tc>
-                  <a:txBody>
-                    <a:bodyPr wrap="square"/>
-                    <a:lstStyle/>
-                    <a:p>
-                      <a:r>
-                        <a:rPr sz="1800" lang="ja-JP">
-                          <a:latin typeface="Noto Sans JP"/>
-                          <a:ea typeface="Noto Sans JP"/>
-                        </a:rPr>
-                        <a:t>CS・森</a:t>
-                      </a:r>
-                    </a:p>
-                  </a:txBody>
-                  <a:tcPr/>
-                </a:tc>
-                <a:tc>
-                  <a:txBody>
-                    <a:bodyPr wrap="square"/>
-                    <a:lstStyle/>
-                    <a:p>
-                      <a:r>
-                        <a:rPr sz="1800" lang="ja-JP">
-                          <a:latin typeface="Noto Sans JP"/>
-                          <a:ea typeface="Noto Sans JP"/>
-                        </a:rPr>
-                        <a:t>上位20商品の返品理由を分類</a:t>
-                      </a:r>
-                    </a:p>
-                  </a:txBody>
-                  <a:tcPr/>
-                </a:tc>
-              </a:tr>
-              <a:tr h="822960">
-                <a:tc>
-                  <a:txBody>
-                    <a:bodyPr wrap="square"/>
-                    <a:lstStyle/>
-                    <a:p>
-                      <a:r>
-                        <a:rPr sz="1800" lang="ja-JP">
-                          <a:latin typeface="Noto Sans JP"/>
-                          <a:ea typeface="Noto Sans JP"/>
-                        </a:rPr>
-                        <a:t>10/16</a:t>
-                      </a:r>
-                    </a:p>
-                  </a:txBody>
-                  <a:tcPr/>
-                </a:tc>
-                <a:tc>
-                  <a:txBody>
-                    <a:bodyPr wrap="square"/>
-                    <a:lstStyle/>
-                    <a:p>
-                      <a:r>
-                        <a:rPr sz="1800" lang="ja-JP">
-                          <a:latin typeface="Noto Sans JP"/>
-                          <a:ea typeface="Noto Sans JP"/>
-                        </a:rPr>
-                        <a:t>商品・青木</a:t>
-                      </a:r>
-                    </a:p>
-                  </a:txBody>
-                  <a:tcPr/>
-                </a:tc>
-                <a:tc>
-                  <a:txBody>
-                    <a:bodyPr wrap="square"/>
-                    <a:lstStyle/>
-                    <a:p>
-                      <a:r>
-                        <a:rPr sz="1800" lang="ja-JP">
-                          <a:latin typeface="Noto Sans JP"/>
-                          <a:ea typeface="Noto Sans JP"/>
-                        </a:rPr>
-                        <a:t>返品上位5商品の説明を改稿</a:t>
-                      </a:r>
-                    </a:p>
-                  </a:txBody>
-                  <a:tcPr/>
-                </a:tc>
-              </a:tr>
-              <a:tr h="822960">
-                <a:tc>
-                  <a:txBody>
-                    <a:bodyPr wrap="square"/>
-                    <a:lstStyle/>
-                    <a:p>
-                      <a:r>
-                        <a:rPr sz="1800" lang="ja-JP">
-                          <a:latin typeface="Noto Sans JP"/>
-                          <a:ea typeface="Noto Sans JP"/>
-                        </a:rPr>
-                        <a:t>10/16</a:t>
-                      </a:r>
-                    </a:p>
-                  </a:txBody>
-                  <a:tcPr/>
-                </a:tc>
-                <a:tc>
-                  <a:txBody>
-                    <a:bodyPr wrap="square"/>
-                    <a:lstStyle/>
-                    <a:p>
-                      <a:r>
-                        <a:rPr sz="1800" lang="ja-JP">
-                          <a:latin typeface="Noto Sans JP"/>
-                          <a:ea typeface="Noto Sans JP"/>
-                        </a:rPr>
-                        <a:t>販売・山田</a:t>
-                      </a:r>
-                    </a:p>
-                  </a:txBody>
-                  <a:tcPr/>
-                </a:tc>
-                <a:tc>
-                  <a:txBody>
-                    <a:bodyPr wrap="square"/>
-                    <a:lstStyle/>
-                    <a:p>
-                      <a:r>
-                        <a:rPr sz="1800" lang="ja-JP">
-                          <a:latin typeface="Noto Sans JP"/>
-                          <a:ea typeface="Noto Sans JP"/>
-                        </a:rPr>
-                        <a:t>粗利率の差分を商品別に分析</a:t>
-                      </a:r>
-                    </a:p>
-                  </a:txBody>
-                  <a:tcPr/>
-                </a:tc>
-              </a:tr>
-            </a:tbl>
-          </a:graphicData>
-        </a:graphic>
-      </p:graphicFrame>
-    </p:spTree>
-  </p:cSld>
-  <p:clrMapOvr>
-    <a:masterClrMapping/>
-  </p:clrMapOvr>
-</p:sld>
-</file>
-
-<file path=ppt/slides/slide6.xml><?xml version="1.0" encoding="utf-8"?>
-<p:sld xmlns:a="http://schemas.openxmlformats.org/drawingml/2006/main" xmlns:p="http://schemas.openxmlformats.org/presentationml/2006/main" xmlns:r="http://schemas.openxmlformats.org/officeDocument/2006/relationships">
-  <p:cSld>
-    <p:spTree>
-      <p:nvGrpSpPr>
-        <p:cNvPr id="1" name=""/>
-        <p:cNvGrpSpPr/>
-        <p:nvPr/>
-      </p:nvGrpSpPr>
-      <p:grpSpPr/>
-      <p:sp>
-        <p:nvSpPr>
-          <p:cNvPr id="2" name="TextBox 1"/>
+              <a:t>6 / 6</a:t>
+            </a:r>
+          </a:p>
+        </p:txBody>
+      </p:sp>
+      <p:sp>
+        <p:nvSpPr>
+          <p:cNvPr id="6" name="TextBox 5"/>
           <p:cNvSpPr txBox="1"/>
           <p:nvPr/>
         </p:nvSpPr>
         <p:spPr>
           <a:xfrm>
-            <a:off x="594360" y="365760"/>
-            <a:ext cx="10972800" cy="914400"/>
+            <a:off x="822960" y="1783080"/>
+            <a:ext cx="10515600" cy="640080"/>
           </a:xfrm>
           <a:prstGeom prst="rect">
             <a:avLst/>
@@ -5930,73 +6462,28 @@
           <a:lstStyle/>
           <a:p>
             <a:r>
-              <a:rPr sz="3100" b="1" lang="ja-JP">
+              <a:rPr sz="3000" b="1" lang="ja-JP">
                 <a:solidFill>
-                  <a:srgbClr val="202C39"/>
+                  <a:srgbClr val="1C6796"/>
                 </a:solidFill>
-                <a:latin typeface="Noto Sans JP"/>
-                <a:ea typeface="Noto Sans JP"/>
+                <a:latin typeface="BIZ UDPGothic"/>
+                <a:ea typeface="BIZ UDPGothic"/>
               </a:rPr>
-              <a:t>次回は施策の完了と利益要因を確認</a:t>
-            </a:r>
-          </a:p>
-        </p:txBody>
-      </p:sp>
-      <p:sp>
-        <p:nvSpPr>
-          <p:cNvPr id="3" name="Rectangle 2"/>
-          <p:cNvSpPr/>
+              <a:t>次回は、3つの成果物で判断する。</a:t>
+            </a:r>
+          </a:p>
+        </p:txBody>
+      </p:sp>
+      <p:sp>
+        <p:nvSpPr>
+          <p:cNvPr id="7" name="TextBox 6"/>
+          <p:cNvSpPr txBox="1"/>
           <p:nvPr/>
         </p:nvSpPr>
         <p:spPr>
           <a:xfrm>
-            <a:off x="640080" y="1298448"/>
-            <a:ext cx="10881360" cy="32004"/>
-          </a:xfrm>
-          <a:prstGeom prst="rect">
-            <a:avLst/>
-          </a:prstGeom>
-          <a:solidFill>
-            <a:srgbClr val="1C6796"/>
-          </a:solidFill>
-          <a:ln>
-            <a:solidFill>
-              <a:srgbClr val="1C6796"/>
-            </a:solidFill>
-          </a:ln>
-        </p:spPr>
-        <p:style>
-          <a:lnRef idx="1">
-            <a:schemeClr val="accent1"/>
-          </a:lnRef>
-          <a:fillRef idx="3">
-            <a:schemeClr val="accent1"/>
-          </a:fillRef>
-          <a:effectRef idx="2">
-            <a:schemeClr val="accent1"/>
-          </a:effectRef>
-          <a:fontRef idx="minor">
-            <a:schemeClr val="lt1"/>
-          </a:fontRef>
-        </p:style>
-        <p:txBody>
-          <a:bodyPr rtlCol="0" anchor="ctr"/>
-          <a:lstStyle/>
-          <a:p>
-            <a:pPr algn="ctr"/>
-          </a:p>
-        </p:txBody>
-      </p:sp>
-      <p:sp>
-        <p:nvSpPr>
-          <p:cNvPr id="4" name="TextBox 3"/>
-          <p:cNvSpPr txBox="1"/>
-          <p:nvPr/>
-        </p:nvSpPr>
-        <p:spPr>
-          <a:xfrm>
-            <a:off x="640080" y="6382512"/>
-            <a:ext cx="9144000" cy="228600"/>
+            <a:off x="822960" y="2788920"/>
+            <a:ext cx="3383280" cy="640080"/>
           </a:xfrm>
           <a:prstGeom prst="rect">
             <a:avLst/>
@@ -6010,28 +6497,28 @@
           <a:lstStyle/>
           <a:p>
             <a:r>
-              <a:rPr sz="1000" b="0" lang="ja-JP">
+              <a:rPr sz="2500" b="1" lang="ja-JP">
                 <a:solidFill>
-                  <a:srgbClr val="202C39"/>
+                  <a:srgbClr val="1C6796"/>
                 </a:solidFill>
-                <a:latin typeface="Noto Sans JP"/>
-                <a:ea typeface="Noto Sans JP"/>
+                <a:latin typeface="BIZ UDPGothic"/>
+                <a:ea typeface="BIZ UDPGothic"/>
               </a:rPr>
-              <a:t>架空の組織・数値による制作サンプル</a:t>
-            </a:r>
-          </a:p>
-        </p:txBody>
-      </p:sp>
-      <p:sp>
-        <p:nvSpPr>
-          <p:cNvPr id="5" name="TextBox 4"/>
+              <a:t>施策の完了</a:t>
+            </a:r>
+          </a:p>
+        </p:txBody>
+      </p:sp>
+      <p:sp>
+        <p:nvSpPr>
+          <p:cNvPr id="8" name="TextBox 7"/>
           <p:cNvSpPr txBox="1"/>
           <p:nvPr/>
         </p:nvSpPr>
         <p:spPr>
           <a:xfrm>
-            <a:off x="10698480" y="6382512"/>
-            <a:ext cx="731520" cy="228600"/>
+            <a:off x="822960" y="3675887"/>
+            <a:ext cx="3383280" cy="1325880"/>
           </a:xfrm>
           <a:prstGeom prst="rect">
             <a:avLst/>
@@ -6045,28 +6532,40 @@
           <a:lstStyle/>
           <a:p>
             <a:r>
-              <a:rPr sz="1000" b="0" lang="ja-JP">
+              <a:rPr sz="2200" b="0" lang="ja-JP">
                 <a:solidFill>
                   <a:srgbClr val="202C39"/>
                 </a:solidFill>
-                <a:latin typeface="Noto Sans JP"/>
-                <a:ea typeface="Noto Sans JP"/>
+                <a:latin typeface="BIZ UDPGothic"/>
+                <a:ea typeface="BIZ UDPGothic"/>
               </a:rPr>
-              <a:t>6 / 6</a:t>
-            </a:r>
-          </a:p>
-        </p:txBody>
-      </p:sp>
-      <p:sp>
-        <p:nvSpPr>
-          <p:cNvPr id="6" name="TextBox 5"/>
+              <a:t>担当者ごとの完了・未完了</a:t>
+            </a:r>
+          </a:p>
+          <a:p>
+            <a:r>
+              <a:rPr sz="2200" b="0" lang="ja-JP">
+                <a:solidFill>
+                  <a:srgbClr val="202C39"/>
+                </a:solidFill>
+                <a:latin typeface="BIZ UDPGothic"/>
+                <a:ea typeface="BIZ UDPGothic"/>
+              </a:rPr>
+              <a:t>未完了なら次の期限</a:t>
+            </a:r>
+          </a:p>
+        </p:txBody>
+      </p:sp>
+      <p:sp>
+        <p:nvSpPr>
+          <p:cNvPr id="9" name="TextBox 8"/>
           <p:cNvSpPr txBox="1"/>
           <p:nvPr/>
         </p:nvSpPr>
         <p:spPr>
           <a:xfrm>
-            <a:off x="822960" y="1828800"/>
-            <a:ext cx="10515600" cy="914400"/>
+            <a:off x="4553712" y="2788920"/>
+            <a:ext cx="3383280" cy="640080"/>
           </a:xfrm>
           <a:prstGeom prst="rect">
             <a:avLst/>
@@ -6080,28 +6579,28 @@
           <a:lstStyle/>
           <a:p>
             <a:r>
-              <a:rPr sz="3200" b="1" lang="ja-JP">
+              <a:rPr sz="2500" b="1" lang="ja-JP">
                 <a:solidFill>
                   <a:srgbClr val="1C6796"/>
                 </a:solidFill>
-                <a:latin typeface="Noto Sans JP"/>
-                <a:ea typeface="Noto Sans JP"/>
+                <a:latin typeface="BIZ UDPGothic"/>
+                <a:ea typeface="BIZ UDPGothic"/>
               </a:rPr>
-              <a:t>商品説明の修正と粗利分析を進める。</a:t>
-            </a:r>
-          </a:p>
-        </p:txBody>
-      </p:sp>
-      <p:sp>
-        <p:nvSpPr>
-          <p:cNvPr id="7" name="TextBox 6"/>
+              <a:t>返品の内訳</a:t>
+            </a:r>
+          </a:p>
+        </p:txBody>
+      </p:sp>
+      <p:sp>
+        <p:nvSpPr>
+          <p:cNvPr id="10" name="TextBox 9"/>
           <p:cNvSpPr txBox="1"/>
           <p:nvPr/>
         </p:nvSpPr>
         <p:spPr>
           <a:xfrm>
-            <a:off x="868680" y="3063240"/>
-            <a:ext cx="10424160" cy="2560320"/>
+            <a:off x="4553712" y="3675887"/>
+            <a:ext cx="3383280" cy="1325880"/>
           </a:xfrm>
           <a:prstGeom prst="rect">
             <a:avLst/>
@@ -6115,40 +6614,143 @@
           <a:lstStyle/>
           <a:p>
             <a:r>
-              <a:rPr sz="2500" b="0" lang="ja-JP">
+              <a:rPr sz="2200" b="0" lang="ja-JP">
                 <a:solidFill>
                   <a:srgbClr val="202C39"/>
                 </a:solidFill>
-                <a:latin typeface="Noto Sans JP"/>
-                <a:ea typeface="Noto Sans JP"/>
+                <a:latin typeface="BIZ UDPGothic"/>
+                <a:ea typeface="BIZ UDPGothic"/>
               </a:rPr>
-              <a:t>次回に確認するもの</a:t>
-            </a:r>
-          </a:p>
-          <a:p/>
-          <a:p>
-            <a:r>
-              <a:rPr sz="2500" b="0" lang="ja-JP">
+              <a:t>理由の分類と件数</a:t>
+            </a:r>
+          </a:p>
+          <a:p>
+            <a:r>
+              <a:rPr sz="2200" b="0" lang="ja-JP">
                 <a:solidFill>
                   <a:srgbClr val="202C39"/>
                 </a:solidFill>
-                <a:latin typeface="Noto Sans JP"/>
-                <a:ea typeface="Noto Sans JP"/>
+                <a:latin typeface="BIZ UDPGothic"/>
+                <a:ea typeface="BIZ UDPGothic"/>
               </a:rPr>
-              <a:t>施策の完了／返品の内訳／商品別の粗利差分</a:t>
-            </a:r>
-          </a:p>
-          <a:p/>
-          <a:p>
-            <a:r>
-              <a:rPr sz="2500" b="0" lang="ja-JP">
+              <a:t>商品説明に足りない情報</a:t>
+            </a:r>
+          </a:p>
+        </p:txBody>
+      </p:sp>
+      <p:sp>
+        <p:nvSpPr>
+          <p:cNvPr id="11" name="TextBox 10"/>
+          <p:cNvSpPr txBox="1"/>
+          <p:nvPr/>
+        </p:nvSpPr>
+        <p:spPr>
+          <a:xfrm>
+            <a:off x="8284464" y="2788920"/>
+            <a:ext cx="3383280" cy="640080"/>
+          </a:xfrm>
+          <a:prstGeom prst="rect">
+            <a:avLst/>
+          </a:prstGeom>
+          <a:noFill/>
+        </p:spPr>
+        <p:txBody>
+          <a:bodyPr wrap="square">
+            <a:spAutoFit/>
+          </a:bodyPr>
+          <a:lstStyle/>
+          <a:p>
+            <a:r>
+              <a:rPr sz="2500" b="1" lang="ja-JP">
+                <a:solidFill>
+                  <a:srgbClr val="1C6796"/>
+                </a:solidFill>
+                <a:latin typeface="BIZ UDPGothic"/>
+                <a:ea typeface="BIZ UDPGothic"/>
+              </a:rPr>
+              <a:t>商品別の粗利差分</a:t>
+            </a:r>
+          </a:p>
+        </p:txBody>
+      </p:sp>
+      <p:sp>
+        <p:nvSpPr>
+          <p:cNvPr id="12" name="TextBox 11"/>
+          <p:cNvSpPr txBox="1"/>
+          <p:nvPr/>
+        </p:nvSpPr>
+        <p:spPr>
+          <a:xfrm>
+            <a:off x="8284464" y="3675887"/>
+            <a:ext cx="3383280" cy="1325880"/>
+          </a:xfrm>
+          <a:prstGeom prst="rect">
+            <a:avLst/>
+          </a:prstGeom>
+          <a:noFill/>
+        </p:spPr>
+        <p:txBody>
+          <a:bodyPr wrap="square">
+            <a:spAutoFit/>
+          </a:bodyPr>
+          <a:lstStyle/>
+          <a:p>
+            <a:r>
+              <a:rPr sz="2200" b="0" lang="ja-JP">
                 <a:solidFill>
                   <a:srgbClr val="202C39"/>
                 </a:solidFill>
-                <a:latin typeface="Noto Sans JP"/>
-                <a:ea typeface="Noto Sans JP"/>
+                <a:latin typeface="BIZ UDPGothic"/>
+                <a:ea typeface="BIZ UDPGothic"/>
               </a:rPr>
-              <a:t>広告増額は、その結果を確認して判断する。</a:t>
+              <a:t>値引き・原価・商品構成</a:t>
+            </a:r>
+          </a:p>
+          <a:p>
+            <a:r>
+              <a:rPr sz="2200" b="0" lang="ja-JP">
+                <a:solidFill>
+                  <a:srgbClr val="202C39"/>
+                </a:solidFill>
+                <a:latin typeface="BIZ UDPGothic"/>
+                <a:ea typeface="BIZ UDPGothic"/>
+              </a:rPr>
+              <a:t>前年差を分けて確認</a:t>
+            </a:r>
+          </a:p>
+        </p:txBody>
+      </p:sp>
+      <p:sp>
+        <p:nvSpPr>
+          <p:cNvPr id="13" name="TextBox 12"/>
+          <p:cNvSpPr txBox="1"/>
+          <p:nvPr/>
+        </p:nvSpPr>
+        <p:spPr>
+          <a:xfrm>
+            <a:off x="822960" y="5513832"/>
+            <a:ext cx="10515600" cy="640080"/>
+          </a:xfrm>
+          <a:prstGeom prst="rect">
+            <a:avLst/>
+          </a:prstGeom>
+          <a:noFill/>
+        </p:spPr>
+        <p:txBody>
+          <a:bodyPr wrap="square">
+            <a:spAutoFit/>
+          </a:bodyPr>
+          <a:lstStyle/>
+          <a:p>
+            <a:r>
+              <a:rPr sz="2500" b="1" lang="ja-JP">
+                <a:solidFill>
+                  <a:srgbClr val="202C39"/>
+                </a:solidFill>
+                <a:latin typeface="BIZ UDPGothic"/>
+                <a:ea typeface="BIZ UDPGothic"/>
+              </a:rPr>
+              <a:t>広告増額は、この結果を確認してから判断する。</a:t>
             </a:r>
           </a:p>
         </p:txBody>
